--- a/special-lectures/special01_all_data_problems_are_human_problems.pptx
+++ b/special-lectures/special01_all_data_problems_are_human_problems.pptx
@@ -1690,7 +1690,7 @@
                   <a:srgbClr val="FFFFFF"/>
                 </a:solidFill>
               </a:rPr>
-              <a:t>All Data Problems Are Human Problems</a:t>
+              <a:t>Week 14: All Data Problems Are Human Problems</a:t>
             </a:r>
             <a:endParaRPr lang="en-US" sz="4000" dirty="0"/>
           </a:p>
